--- a/lci_esophagectomy.pptx
+++ b/lci_esophagectomy.pptx
@@ -3555,34 +3555,6 @@
           </a:p>
         </p:txBody>
       </p:sp>
-      <p:sp>
-        <p:nvSpPr>
-          <p:cNvPr id="3" name="Subtitle 2"/>
-          <p:cNvSpPr>
-            <a:spLocks noGrp="1"/>
-          </p:cNvSpPr>
-          <p:nvPr>
-            <p:ph idx="1" type="subTitle"/>
-          </p:nvPr>
-        </p:nvSpPr>
-        <p:spPr>
-          <a:xfrm>
-            <a:off x="1371600" y="2914650"/>
-            <a:ext cx="6400800" cy="1314450"/>
-          </a:xfrm>
-        </p:spPr>
-        <p:txBody>
-          <a:bodyPr/>
-          <a:lstStyle/>
-          <a:p>
-            <a:pPr lvl="0" indent="0" marL="0">
-              <a:buNone/>
-            </a:pPr>
-            <a:br/>
-            <a:br/>
-          </a:p>
-        </p:txBody>
-      </p:sp>
     </p:spTree>
   </p:cSld>
 </p:sld>
@@ -5190,7 +5162,9 @@
         <p:nvSpPr>
           <p:cNvPr id="1" name="TextBox 3"/>
           <p:cNvSpPr txBox="1"/>
-          <p:nvPr/>
+          <p:nvPr>
+            <p:ph idx="1"/>
+          </p:nvPr>
         </p:nvSpPr>
         <p:spPr>
           <a:xfrm>

--- a/lci_esophagectomy.pptx
+++ b/lci_esophagectomy.pptx
@@ -9305,7 +9305,30 @@
             </a:pPr>
             <a:r>
               <a:rPr/>
-              <a:t>Navigator - Laura Swift</a:t>
+              <a:t>Navigators</a:t>
+            </a:r>
+          </a:p>
+          <a:p>
+            <a:pPr lvl="0"/>
+            <a:r>
+              <a:rPr/>
+              <a:t>Laura Swift</a:t>
+            </a:r>
+          </a:p>
+          <a:p>
+            <a:pPr lvl="0"/>
+            <a:r>
+              <a:rPr/>
+              <a:t>Lorna Espinal</a:t>
+            </a:r>
+          </a:p>
+          <a:p>
+            <a:pPr lvl="0" indent="0" marL="0">
+              <a:buNone/>
+            </a:pPr>
+            <a:r>
+              <a:rPr/>
+              <a:t>Care Coordinator - Karen Julian-Martinez</a:t>
             </a:r>
           </a:p>
         </p:txBody>
@@ -9834,7 +9857,30 @@
             </a:pPr>
             <a:r>
               <a:rPr/>
-              <a:t>Navigator - Laura Swift</a:t>
+              <a:t>Navigators</a:t>
+            </a:r>
+          </a:p>
+          <a:p>
+            <a:pPr lvl="0"/>
+            <a:r>
+              <a:rPr/>
+              <a:t>Laura Swift</a:t>
+            </a:r>
+          </a:p>
+          <a:p>
+            <a:pPr lvl="0"/>
+            <a:r>
+              <a:rPr/>
+              <a:t>Lorna Espinal</a:t>
+            </a:r>
+          </a:p>
+          <a:p>
+            <a:pPr lvl="0" indent="0" marL="0">
+              <a:buNone/>
+            </a:pPr>
+            <a:r>
+              <a:rPr/>
+              <a:t>Care Coordinator - Karen Julian-Martinez</a:t>
             </a:r>
           </a:p>
         </p:txBody>

--- a/lci_esophagectomy.pptx
+++ b/lci_esophagectomy.pptx
@@ -9273,6 +9273,15 @@
             </a:pPr>
             <a:r>
               <a:rPr/>
+              <a:t>Physician Assistant - Kate Duncan PA-C</a:t>
+            </a:r>
+          </a:p>
+          <a:p>
+            <a:pPr lvl="0" indent="0" marL="0">
+              <a:buNone/>
+            </a:pPr>
+            <a:r>
+              <a:rPr/>
               <a:t>Dietitian - Liz Koch</a:t>
             </a:r>
           </a:p>
@@ -9819,6 +9828,15 @@
         <p:txBody>
           <a:bodyPr/>
           <a:lstStyle/>
+          <a:p>
+            <a:pPr lvl="0" indent="0" marL="0">
+              <a:buNone/>
+            </a:pPr>
+            <a:r>
+              <a:rPr/>
+              <a:t>Physician Assistant - Kate Duncan PA-C</a:t>
+            </a:r>
+          </a:p>
           <a:p>
             <a:pPr lvl="0" indent="0" marL="0">
               <a:buNone/>

--- a/lci_esophagectomy.pptx
+++ b/lci_esophagectomy.pptx
@@ -59,11 +59,6 @@
     <p:sldId id="307" r:id="rId53"/>
     <p:sldId id="308" r:id="rId54"/>
     <p:sldId id="309" r:id="rId55"/>
-    <p:sldId id="310" r:id="rId56"/>
-    <p:sldId id="311" r:id="rId57"/>
-    <p:sldId id="312" r:id="rId58"/>
-    <p:sldId id="313" r:id="rId59"/>
-    <p:sldId id="314" r:id="rId60"/>
   </p:sldIdLst>
   <p:sldSz cx="9144000" cy="5143500" type="screen16x9"/>
   <p:notesSz cx="6858000" cy="9144000"/>
@@ -9207,567 +9202,6 @@
 </file>
 
 <file path=ppt/slides/slide54.xml><?xml version="1.0" encoding="utf-8"?>
-<p:sld xmlns:a="http://schemas.openxmlformats.org/drawingml/2006/main" xmlns:r="http://schemas.openxmlformats.org/officeDocument/2006/relationships" xmlns:p="http://schemas.openxmlformats.org/presentationml/2006/main">
-  <p:cSld>
-    <p:spTree>
-      <p:nvGrpSpPr>
-        <p:cNvPr id="1" name=""/>
-        <p:cNvGrpSpPr/>
-        <p:nvPr/>
-      </p:nvGrpSpPr>
-      <p:grpSpPr>
-        <a:xfrm>
-          <a:off x="0" y="0"/>
-          <a:ext cx="0" cy="0"/>
-          <a:chOff x="0" y="0"/>
-          <a:chExt cx="0" cy="0"/>
-        </a:xfrm>
-      </p:grpSpPr>
-      <p:sp>
-        <p:nvSpPr>
-          <p:cNvPr id="2" name="Title 1"/>
-          <p:cNvSpPr>
-            <a:spLocks noGrp="1"/>
-          </p:cNvSpPr>
-          <p:nvPr>
-            <p:ph type="title"/>
-          </p:nvPr>
-        </p:nvSpPr>
-        <p:spPr>
-          <a:xfrm>
-            <a:off x="284309" y="205979"/>
-            <a:ext cx="8552330" cy="662317"/>
-          </a:xfrm>
-        </p:spPr>
-        <p:txBody>
-          <a:bodyPr/>
-          <a:lstStyle/>
-          <a:p>
-            <a:pPr lvl="0" indent="0" marL="0">
-              <a:buNone/>
-            </a:pPr>
-            <a:r>
-              <a:rPr/>
-              <a:t>Team Members - Support Staff</a:t>
-            </a:r>
-          </a:p>
-        </p:txBody>
-      </p:sp>
-      <p:sp>
-        <p:nvSpPr>
-          <p:cNvPr id="3" name="Content Placeholder 2"/>
-          <p:cNvSpPr>
-            <a:spLocks noGrp="1"/>
-          </p:cNvSpPr>
-          <p:nvPr>
-            <p:ph idx="1"/>
-          </p:nvPr>
-        </p:nvSpPr>
-        <p:spPr/>
-        <p:txBody>
-          <a:bodyPr/>
-          <a:lstStyle/>
-          <a:p>
-            <a:pPr lvl="0" indent="0" marL="0">
-              <a:buNone/>
-            </a:pPr>
-            <a:r>
-              <a:rPr/>
-              <a:t>Physician Assistant - Kate Duncan PA-C</a:t>
-            </a:r>
-          </a:p>
-          <a:p>
-            <a:pPr lvl="0" indent="0" marL="0">
-              <a:buNone/>
-            </a:pPr>
-            <a:r>
-              <a:rPr/>
-              <a:t>Dietitian - Liz Koch</a:t>
-            </a:r>
-          </a:p>
-          <a:p>
-            <a:pPr lvl="0" indent="0" marL="0">
-              <a:buNone/>
-            </a:pPr>
-            <a:r>
-              <a:rPr/>
-              <a:t>Nurses</a:t>
-            </a:r>
-          </a:p>
-          <a:p>
-            <a:pPr lvl="0"/>
-            <a:r>
-              <a:rPr/>
-              <a:t>Matthew Carpenter RN</a:t>
-            </a:r>
-          </a:p>
-          <a:p>
-            <a:pPr lvl="0"/>
-            <a:r>
-              <a:rPr/>
-              <a:t>Brandon Galloway LPN</a:t>
-            </a:r>
-          </a:p>
-          <a:p>
-            <a:pPr lvl="0" indent="0" marL="0">
-              <a:buNone/>
-            </a:pPr>
-            <a:r>
-              <a:rPr/>
-              <a:t>Navigators</a:t>
-            </a:r>
-          </a:p>
-          <a:p>
-            <a:pPr lvl="0"/>
-            <a:r>
-              <a:rPr/>
-              <a:t>Laura Swift</a:t>
-            </a:r>
-          </a:p>
-          <a:p>
-            <a:pPr lvl="0"/>
-            <a:r>
-              <a:rPr/>
-              <a:t>Lorna Espinal</a:t>
-            </a:r>
-          </a:p>
-          <a:p>
-            <a:pPr lvl="0" indent="0" marL="0">
-              <a:buNone/>
-            </a:pPr>
-            <a:r>
-              <a:rPr/>
-              <a:t>Care Coordinator - Karen Julian-Martinez</a:t>
-            </a:r>
-          </a:p>
-        </p:txBody>
-      </p:sp>
-    </p:spTree>
-  </p:cSld>
-</p:sld>
-</file>
-
-<file path=ppt/slides/slide55.xml><?xml version="1.0" encoding="utf-8"?>
-<p:sld xmlns:a="http://schemas.openxmlformats.org/drawingml/2006/main" xmlns:r="http://schemas.openxmlformats.org/officeDocument/2006/relationships" xmlns:p="http://schemas.openxmlformats.org/presentationml/2006/main">
-  <p:cSld>
-    <p:spTree>
-      <p:nvGrpSpPr>
-        <p:cNvPr id="1" name=""/>
-        <p:cNvGrpSpPr/>
-        <p:nvPr/>
-      </p:nvGrpSpPr>
-      <p:grpSpPr>
-        <a:xfrm>
-          <a:off x="0" y="0"/>
-          <a:ext cx="0" cy="0"/>
-          <a:chOff x="0" y="0"/>
-          <a:chExt cx="0" cy="0"/>
-        </a:xfrm>
-      </p:grpSpPr>
-      <p:sp>
-        <p:nvSpPr>
-          <p:cNvPr id="2" name="Title 1"/>
-          <p:cNvSpPr>
-            <a:spLocks noGrp="1"/>
-          </p:cNvSpPr>
-          <p:nvPr>
-            <p:ph type="title"/>
-          </p:nvPr>
-        </p:nvSpPr>
-        <p:spPr>
-          <a:xfrm>
-            <a:off x="284309" y="205979"/>
-            <a:ext cx="8552330" cy="662317"/>
-          </a:xfrm>
-        </p:spPr>
-        <p:txBody>
-          <a:bodyPr/>
-          <a:lstStyle/>
-          <a:p>
-            <a:pPr lvl="0" indent="0" marL="0">
-              <a:buNone/>
-            </a:pPr>
-            <a:r>
-              <a:rPr/>
-              <a:t>Day Prior to Surgery</a:t>
-            </a:r>
-          </a:p>
-        </p:txBody>
-      </p:sp>
-      <p:sp>
-        <p:nvSpPr>
-          <p:cNvPr id="3" name="Content Placeholder 2"/>
-          <p:cNvSpPr>
-            <a:spLocks noGrp="1"/>
-          </p:cNvSpPr>
-          <p:nvPr>
-            <p:ph idx="1"/>
-          </p:nvPr>
-        </p:nvSpPr>
-        <p:spPr/>
-        <p:txBody>
-          <a:bodyPr/>
-          <a:lstStyle/>
-          <a:p>
-            <a:pPr lvl="0"/>
-            <a:r>
-              <a:rPr/>
-              <a:t>Clear liquids for dinner evening prior</a:t>
-            </a:r>
-          </a:p>
-          <a:p>
-            <a:pPr lvl="0"/>
-            <a:r>
-              <a:rPr/>
-              <a:t>You will receive instructions regarding medicines</a:t>
-            </a:r>
-          </a:p>
-        </p:txBody>
-      </p:sp>
-    </p:spTree>
-  </p:cSld>
-</p:sld>
-</file>
-
-<file path=ppt/slides/slide56.xml><?xml version="1.0" encoding="utf-8"?>
-<p:sld xmlns:a="http://schemas.openxmlformats.org/drawingml/2006/main" xmlns:r="http://schemas.openxmlformats.org/officeDocument/2006/relationships" xmlns:p="http://schemas.openxmlformats.org/presentationml/2006/main">
-  <p:cSld>
-    <p:spTree>
-      <p:nvGrpSpPr>
-        <p:cNvPr id="1" name=""/>
-        <p:cNvGrpSpPr/>
-        <p:nvPr/>
-      </p:nvGrpSpPr>
-      <p:grpSpPr>
-        <a:xfrm>
-          <a:off x="0" y="0"/>
-          <a:ext cx="0" cy="0"/>
-          <a:chOff x="0" y="0"/>
-          <a:chExt cx="0" cy="0"/>
-        </a:xfrm>
-      </p:grpSpPr>
-      <p:sp>
-        <p:nvSpPr>
-          <p:cNvPr id="2" name="Title 1"/>
-          <p:cNvSpPr>
-            <a:spLocks noGrp="1"/>
-          </p:cNvSpPr>
-          <p:nvPr>
-            <p:ph type="title"/>
-          </p:nvPr>
-        </p:nvSpPr>
-        <p:spPr>
-          <a:xfrm>
-            <a:off x="284309" y="205979"/>
-            <a:ext cx="8552330" cy="662317"/>
-          </a:xfrm>
-        </p:spPr>
-        <p:txBody>
-          <a:bodyPr/>
-          <a:lstStyle/>
-          <a:p>
-            <a:pPr lvl="0" indent="0" marL="0">
-              <a:buNone/>
-            </a:pPr>
-            <a:r>
-              <a:rPr/>
-              <a:t>Day of Surgery</a:t>
-            </a:r>
-          </a:p>
-        </p:txBody>
-      </p:sp>
-      <p:sp>
-        <p:nvSpPr>
-          <p:cNvPr id="3" name="Content Placeholder 2"/>
-          <p:cNvSpPr>
-            <a:spLocks noGrp="1"/>
-          </p:cNvSpPr>
-          <p:nvPr>
-            <p:ph idx="1"/>
-          </p:nvPr>
-        </p:nvSpPr>
-        <p:spPr/>
-        <p:txBody>
-          <a:bodyPr/>
-          <a:lstStyle/>
-          <a:p>
-            <a:pPr lvl="0" indent="0" marL="0">
-              <a:buNone/>
-            </a:pPr>
-            <a:r>
-              <a:rPr/>
-              <a:t>Unless instructed otherwise:</a:t>
-            </a:r>
-          </a:p>
-          <a:p>
-            <a:pPr lvl="0"/>
-            <a:r>
-              <a:rPr/>
-              <a:t>You will be notified regarding </a:t>
-            </a:r>
-            <a:r>
-              <a:rPr i="1"/>
-              <a:t>arrival</a:t>
-            </a:r>
-            <a:r>
-              <a:rPr/>
-              <a:t> time, which is usually 2-3 hours before the </a:t>
-            </a:r>
-            <a:r>
-              <a:rPr i="1"/>
-              <a:t>surgery</a:t>
-            </a:r>
-            <a:r>
-              <a:rPr/>
-              <a:t> time.</a:t>
-            </a:r>
-          </a:p>
-          <a:p>
-            <a:pPr lvl="0"/>
-            <a:r>
-              <a:rPr/>
-              <a:t>Nothing to eat or drink after midnight</a:t>
-            </a:r>
-          </a:p>
-        </p:txBody>
-      </p:sp>
-    </p:spTree>
-  </p:cSld>
-</p:sld>
-</file>
-
-<file path=ppt/slides/slide57.xml><?xml version="1.0" encoding="utf-8"?>
-<p:sld xmlns:a="http://schemas.openxmlformats.org/drawingml/2006/main" xmlns:r="http://schemas.openxmlformats.org/officeDocument/2006/relationships" xmlns:p="http://schemas.openxmlformats.org/presentationml/2006/main">
-  <p:cSld>
-    <p:spTree>
-      <p:nvGrpSpPr>
-        <p:cNvPr id="1" name=""/>
-        <p:cNvGrpSpPr/>
-        <p:nvPr/>
-      </p:nvGrpSpPr>
-      <p:grpSpPr>
-        <a:xfrm>
-          <a:off x="0" y="0"/>
-          <a:ext cx="0" cy="0"/>
-          <a:chOff x="0" y="0"/>
-          <a:chExt cx="0" cy="0"/>
-        </a:xfrm>
-      </p:grpSpPr>
-      <p:sp>
-        <p:nvSpPr>
-          <p:cNvPr id="2" name="Title 1"/>
-          <p:cNvSpPr>
-            <a:spLocks noGrp="1"/>
-          </p:cNvSpPr>
-          <p:nvPr>
-            <p:ph type="title"/>
-          </p:nvPr>
-        </p:nvSpPr>
-        <p:spPr>
-          <a:xfrm>
-            <a:off x="284309" y="205979"/>
-            <a:ext cx="8552330" cy="662317"/>
-          </a:xfrm>
-        </p:spPr>
-        <p:txBody>
-          <a:bodyPr/>
-          <a:lstStyle/>
-          <a:p>
-            <a:pPr lvl="0" indent="0" marL="0">
-              <a:buNone/>
-            </a:pPr>
-            <a:r>
-              <a:rPr/>
-              <a:t>Medicines the Day of Surgery</a:t>
-            </a:r>
-          </a:p>
-        </p:txBody>
-      </p:sp>
-      <p:sp>
-        <p:nvSpPr>
-          <p:cNvPr id="3" name="Content Placeholder 2"/>
-          <p:cNvSpPr>
-            <a:spLocks noGrp="1"/>
-          </p:cNvSpPr>
-          <p:nvPr>
-            <p:ph idx="1"/>
-          </p:nvPr>
-        </p:nvSpPr>
-        <p:spPr/>
-        <p:txBody>
-          <a:bodyPr/>
-          <a:lstStyle/>
-          <a:p>
-            <a:pPr lvl="0"/>
-            <a:r>
-              <a:rPr/>
-              <a:t>Medicines with a sip of water or </a:t>
-            </a:r>
-            <a:r>
-              <a:rPr i="1"/>
-              <a:t>black</a:t>
-            </a:r>
-            <a:r>
-              <a:rPr/>
-              <a:t> coffee</a:t>
-            </a:r>
-          </a:p>
-          <a:p>
-            <a:pPr lvl="0"/>
-            <a:r>
-              <a:rPr/>
-              <a:t>No milk or cream</a:t>
-            </a:r>
-          </a:p>
-          <a:p>
-            <a:pPr lvl="0"/>
-            <a:r>
-              <a:rPr/>
-              <a:t>Surgery will be cancelled for milk/cream</a:t>
-            </a:r>
-          </a:p>
-        </p:txBody>
-      </p:sp>
-    </p:spTree>
-  </p:cSld>
-</p:sld>
-</file>
-
-<file path=ppt/slides/slide58.xml><?xml version="1.0" encoding="utf-8"?>
-<p:sld xmlns:a="http://schemas.openxmlformats.org/drawingml/2006/main" xmlns:r="http://schemas.openxmlformats.org/officeDocument/2006/relationships" xmlns:p="http://schemas.openxmlformats.org/presentationml/2006/main">
-  <p:cSld>
-    <p:spTree>
-      <p:nvGrpSpPr>
-        <p:cNvPr id="1" name=""/>
-        <p:cNvGrpSpPr/>
-        <p:nvPr/>
-      </p:nvGrpSpPr>
-      <p:grpSpPr>
-        <a:xfrm>
-          <a:off x="0" y="0"/>
-          <a:ext cx="0" cy="0"/>
-          <a:chOff x="0" y="0"/>
-          <a:chExt cx="0" cy="0"/>
-        </a:xfrm>
-      </p:grpSpPr>
-      <p:sp>
-        <p:nvSpPr>
-          <p:cNvPr id="2" name="Title 1"/>
-          <p:cNvSpPr>
-            <a:spLocks noGrp="1"/>
-          </p:cNvSpPr>
-          <p:nvPr>
-            <p:ph type="title"/>
-          </p:nvPr>
-        </p:nvSpPr>
-        <p:spPr>
-          <a:xfrm>
-            <a:off x="284309" y="205979"/>
-            <a:ext cx="8552330" cy="662317"/>
-          </a:xfrm>
-        </p:spPr>
-        <p:txBody>
-          <a:bodyPr/>
-          <a:lstStyle/>
-          <a:p>
-            <a:pPr lvl="0" indent="0" marL="0">
-              <a:buNone/>
-            </a:pPr>
-            <a:r>
-              <a:rPr/>
-              <a:t>Team Members - Physicians</a:t>
-            </a:r>
-          </a:p>
-        </p:txBody>
-      </p:sp>
-      <p:sp>
-        <p:nvSpPr>
-          <p:cNvPr id="3" name="Content Placeholder 2"/>
-          <p:cNvSpPr>
-            <a:spLocks noGrp="1"/>
-          </p:cNvSpPr>
-          <p:nvPr>
-            <p:ph idx="1"/>
-          </p:nvPr>
-        </p:nvSpPr>
-        <p:spPr/>
-        <p:txBody>
-          <a:bodyPr/>
-          <a:lstStyle/>
-          <a:p>
-            <a:pPr lvl="0" indent="0" marL="0">
-              <a:buNone/>
-            </a:pPr>
-            <a:r>
-              <a:rPr/>
-              <a:t>Primary Care Provider</a:t>
-            </a:r>
-          </a:p>
-          <a:p>
-            <a:pPr lvl="0" indent="0" marL="0">
-              <a:buNone/>
-            </a:pPr>
-            <a:r>
-              <a:rPr/>
-              <a:t>Gastroenterologist</a:t>
-            </a:r>
-          </a:p>
-          <a:p>
-            <a:pPr lvl="0" indent="0" marL="0">
-              <a:buNone/>
-            </a:pPr>
-            <a:r>
-              <a:rPr/>
-              <a:t>Medical Oncologist (chemotherapy)</a:t>
-            </a:r>
-          </a:p>
-          <a:p>
-            <a:pPr lvl="0" indent="0" marL="0">
-              <a:buNone/>
-            </a:pPr>
-            <a:r>
-              <a:rPr/>
-              <a:t>Radiation Oncologist (radiation)</a:t>
-            </a:r>
-          </a:p>
-          <a:p>
-            <a:pPr lvl="0" indent="0" marL="0">
-              <a:buNone/>
-            </a:pPr>
-            <a:r>
-              <a:rPr/>
-              <a:t>Surgeons</a:t>
-            </a:r>
-          </a:p>
-          <a:p>
-            <a:pPr lvl="0"/>
-            <a:r>
-              <a:rPr/>
-              <a:t>Jonathan Salo MD</a:t>
-            </a:r>
-          </a:p>
-          <a:p>
-            <a:pPr lvl="0"/>
-            <a:r>
-              <a:rPr/>
-              <a:t>Jeffrey Hagen MD</a:t>
-            </a:r>
-          </a:p>
-          <a:p>
-            <a:pPr lvl="0"/>
-            <a:r>
-              <a:rPr/>
-              <a:t>Michael Roach MD</a:t>
-            </a:r>
-          </a:p>
-        </p:txBody>
-      </p:sp>
-    </p:spTree>
-  </p:cSld>
-</p:sld>
-</file>
-
-<file path=ppt/slides/slide59.xml><?xml version="1.0" encoding="utf-8"?>
 <p:sld xmlns:a="http://schemas.openxmlformats.org/drawingml/2006/main" xmlns:r="http://schemas.openxmlformats.org/officeDocument/2006/relationships" xmlns:p="http://schemas.openxmlformats.org/presentationml/2006/main">
   <p:cSld>
     <p:spTree>
